--- a/hearts-and-minds/journey-decks/hm-journey-hannah-v1.pptx
+++ b/hearts-and-minds/journey-decks/hm-journey-hannah-v1.pptx
@@ -1940,7 +1940,7 @@
       </p:sp>
       <p:pic>
         <p:nvPicPr>
-          <p:cNvPr id="10" name="Image 1" descr="/sessions/quirky-zen-galileo/mnt/outputs/hmdecks/img/hannah-portrait.jpg">    </p:cNvPr>
+          <p:cNvPr id="10" name="Image 1" descr="/sessions/quirky-zen-galileo/mnt/outputs/hmdecks5/img/hannah-portrait.jpg">    </p:cNvPr>
           <p:cNvPicPr>
             <a:picLocks noChangeAspect="1"/>
           </p:cNvPicPr>
@@ -4382,7 +4382,7 @@
       </p:sp>
       <p:pic>
         <p:nvPicPr>
-          <p:cNvPr id="13" name="Image 1" descr="/sessions/quirky-zen-galileo/mnt/outputs/hmdecks/img/hannah-stage1.jpg">    </p:cNvPr>
+          <p:cNvPr id="13" name="Image 1" descr="/sessions/quirky-zen-galileo/mnt/outputs/hmdecks5/img/hannah-stage1.jpg">    </p:cNvPr>
           <p:cNvPicPr>
             <a:picLocks noChangeAspect="1"/>
           </p:cNvPicPr>
@@ -5315,7 +5315,7 @@
       </p:sp>
       <p:pic>
         <p:nvPicPr>
-          <p:cNvPr id="13" name="Image 1" descr="/sessions/quirky-zen-galileo/mnt/outputs/hmdecks/img/hannah-stage2.jpg">    </p:cNvPr>
+          <p:cNvPr id="13" name="Image 1" descr="/sessions/quirky-zen-galileo/mnt/outputs/hmdecks5/img/hannah-stage2.jpg">    </p:cNvPr>
           <p:cNvPicPr>
             <a:picLocks noChangeAspect="1"/>
           </p:cNvPicPr>
@@ -6248,7 +6248,7 @@
       </p:sp>
       <p:pic>
         <p:nvPicPr>
-          <p:cNvPr id="13" name="Image 1" descr="/sessions/quirky-zen-galileo/mnt/outputs/hmdecks/img/hannah-stage3.jpg">    </p:cNvPr>
+          <p:cNvPr id="13" name="Image 1" descr="/sessions/quirky-zen-galileo/mnt/outputs/hmdecks5/img/hannah-stage3.jpg">    </p:cNvPr>
           <p:cNvPicPr>
             <a:picLocks noChangeAspect="1"/>
           </p:cNvPicPr>
@@ -7181,7 +7181,7 @@
       </p:sp>
       <p:pic>
         <p:nvPicPr>
-          <p:cNvPr id="13" name="Image 1" descr="/sessions/quirky-zen-galileo/mnt/outputs/hmdecks/img/hannah-stage4.jpg">    </p:cNvPr>
+          <p:cNvPr id="13" name="Image 1" descr="/sessions/quirky-zen-galileo/mnt/outputs/hmdecks5/img/hannah-stage4.jpg">    </p:cNvPr>
           <p:cNvPicPr>
             <a:picLocks noChangeAspect="1"/>
           </p:cNvPicPr>
@@ -8114,7 +8114,7 @@
       </p:sp>
       <p:pic>
         <p:nvPicPr>
-          <p:cNvPr id="13" name="Image 1" descr="/sessions/quirky-zen-galileo/mnt/outputs/hmdecks/img/hannah-stage5.jpg">    </p:cNvPr>
+          <p:cNvPr id="13" name="Image 1" descr="/sessions/quirky-zen-galileo/mnt/outputs/hmdecks5/img/hannah-stage5.jpg">    </p:cNvPr>
           <p:cNvPicPr>
             <a:picLocks noChangeAspect="1"/>
           </p:cNvPicPr>
@@ -9047,7 +9047,7 @@
       </p:sp>
       <p:pic>
         <p:nvPicPr>
-          <p:cNvPr id="13" name="Image 1" descr="/sessions/quirky-zen-galileo/mnt/outputs/hmdecks/img/hannah-stage6.jpg">    </p:cNvPr>
+          <p:cNvPr id="13" name="Image 1" descr="/sessions/quirky-zen-galileo/mnt/outputs/hmdecks5/img/hannah-stage6.jpg">    </p:cNvPr>
           <p:cNvPicPr>
             <a:picLocks noChangeAspect="1"/>
           </p:cNvPicPr>
